--- a/decks/hist-medicine/hist-medicine_ch3_four-humours.pptx
+++ b/decks/hist-medicine/hist-medicine_ch3_four-humours.pptx
@@ -126,30 +126,30 @@
   <p:extLst>
     <p:ext uri="{521415D9-36F7-43E2-AB2F-B90AF26B5E84}">
       <p14:sectionLst xmlns:p14="http://schemas.microsoft.com/office/powerpoint/2010/main">
-        <p14:section name="Opening" id="{09057f02-7c98-b23f-5094-088ae2467bf3}">
+        <p14:section name="Opening" id="{2c6cbfbd-585a-4696-7095-72585edaa220}">
           <p14:sldIdLst>
             <p14:sldId id="256"/>
           </p14:sldIdLst>
         </p14:section>
-        <p14:section name="Gate" id="{a9ec77f5-5703-3c33-19c0-e68cdb57b6e1}">
+        <p14:section name="Gate" id="{8e0791f2-00cd-ae97-0b40-9020f5baa479}">
           <p14:sldIdLst>
             <p14:sldId id="257"/>
             <p14:sldId id="258"/>
           </p14:sldIdLst>
         </p14:section>
-        <p14:section name="Pre-teach" id="{9ae75ffb-1349-171d-0eba-e716204bb849}">
+        <p14:section name="Pre-teach" id="{24f4aeab-d64e-0038-8c09-bc999034f09d}">
           <p14:sldIdLst>
             <p14:sldId id="259"/>
             <p14:sldId id="260"/>
           </p14:sldIdLst>
         </p14:section>
-        <p14:section name="Read-along" id="{366d6606-5816-084b-38ab-ec9f3b698221}">
+        <p14:section name="Read-along" id="{7fd1ee26-8ad7-c471-24d9-e1b68a315d16}">
           <p14:sldIdLst>
             <p14:sldId id="261"/>
             <p14:sldId id="262"/>
           </p14:sldIdLst>
         </p14:section>
-        <p14:section name="Teach" id="{656106b7-1adb-9594-9cfe-b1ce9f2493ee}">
+        <p14:section name="Teach" id="{bda96cb1-f0a2-aa5e-e808-7c5f051d44d3}">
           <p14:sldIdLst>
             <p14:sldId id="263"/>
             <p14:sldId id="264"/>
@@ -158,7 +158,7 @@
             <p14:sldId id="267"/>
           </p14:sldIdLst>
         </p14:section>
-        <p14:section name="Routes" id="{abc40115-86d0-d4db-140a-6e742fe090a0}">
+        <p14:section name="Routes" id="{af83ac7f-2bbf-f718-3705-981bfd17d23e}">
           <p14:sldIdLst>
             <p14:sldId id="268"/>
             <p14:sldId id="269"/>
@@ -166,12 +166,12 @@
             <p14:sldId id="271"/>
           </p14:sldIdLst>
         </p14:section>
-        <p14:section name="Close" id="{f1994917-82ef-69d9-521a-13a70ae7761a}">
+        <p14:section name="Close" id="{d2b4ae93-3db4-7330-ab02-277cff0480cd}">
           <p14:sldIdLst>
             <p14:sldId id="272"/>
           </p14:sldIdLst>
         </p14:section>
-        <p14:section name="Answers" id="{2a463dff-6598-944d-30c6-5e23f8abf7b9}">
+        <p14:section name="Answers" id="{4b8aed24-0aa9-7b2a-3841-cdc5f43be519}">
           <p14:sldIdLst>
             <p14:sldId id="273"/>
             <p14:sldId id="274"/>
@@ -1327,7 +1327,7 @@
               <a:rPr lang="en-US" dirty="0"/>
               <a:t>Exit ticket — individual, silent, on a slip or mini-whiteboard. Recall before help: no notes, no lanes, no hints. Collect before pupils leave.
 Question: Who first set out the Theory of the Four Humours?
-Answer: D   Hippocrates, in Ancient Greece. Hippocrates, a doctor in fifth-century BC Greece, set out the Four Humours. Galen developed the theory about five hundred years later.
+Answer: A   Hippocrates, in Ancient Greece. Hippocrates, a doctor in fifth-century BC Greece, set out the Four Humours. Galen developed the theory about five hundred years later.
 Source of this question: gate item 1 re-asked (options rotated) — this chapter has no third quick-check module.
 The ebook also holds task 3, "Explain one way the Church kept the theory popular", for homework or the next lesson's do now.
 Sort the slips: correct → ready to move on; incorrect → start next lesson in the pre-teach group, with the read-along and the Support lane. Same destination next time.</a:t>
@@ -1510,7 +1510,7 @@
             <a:r>
               <a:rPr lang="en-US" dirty="0"/>
               <a:t>Answers — task 2: Using the Theory of Opposites. Reveal the answer; pupils mark their own work in a different colour, then read the "why" together. Same destination for every lane, so one answer serves the whole class.
-Answer: A   Something cold and wet, such as cucumber
+Answer: C   Something cold and wet, such as cucumber
 Why: By the Theory of Opposites, a hot illness needs a cold remedy. Whoever the patient is, a fever is hot and red, so the advice is cold and wet: cucumber, or bleeding.
 Ask a Support pupil to explain one step, and a Stretch pupil to share their extension.</a:t>
             </a:r>
@@ -1601,9 +1601,9 @@
             <a:r>
               <a:rPr lang="en-US" dirty="0"/>
               <a:t>Do now — retrieval. Silent, no notes, no help: recall comes before any support. Give about four minutes.
-1. Who first set out the Theory of the Four Humours?  →  A   Hippocrates, in Ancient Greece
+1. Who first set out the Theory of the Four Humours?  →  B   Hippocrates, in Ancient Greece
 2. Galen's ___ said that an illness should be treated with its opposite: a hot cure for a cold illness.  →  Theory of Opposites
-3. Which four liquids did the Theory of the Four Humours say made up the body?  →  A   Blood, phlegm, yellow bile and black bile
+3. Which four liquids did the Theory of the Four Humours say made up the body?  →  C   Blood, phlegm, yellow bile and black bile
 Circulate: who gets 3/3 (Stretch route), 2/3 (Core), 0–1 (Support)? Use this to route pupils later in the lesson.</a:t>
             </a:r>
             <a:endParaRPr lang="en-US" dirty="0"/>
@@ -1693,7 +1693,7 @@
             <a:r>
               <a:rPr lang="en-US" dirty="0"/>
               <a:t>Answers — exit ticket: Exit ticket. Reveal the answer; pupils mark their own work in a different colour, then read the "why" together. Same destination for every lane, so one answer serves the whole class.
-Answer: D   Hippocrates, in Ancient Greece
+Answer: A   Hippocrates, in Ancient Greece
 Why: Hippocrates, a doctor in fifth-century BC Greece, set out the Four Humours. Galen developed the theory about five hundred years later.
 Ask a Support pupil to explain one step, and a Stretch pupil to share their extension.</a:t>
             </a:r>
@@ -1784,9 +1784,9 @@
             <a:r>
               <a:rPr lang="en-US" dirty="0"/>
               <a:t>Answers — pupils mark their own in a different colour, then hands up for 3/3, 2/3, 1/3.
-1. A   Hippocrates, in Ancient Greece. Hippocrates, a doctor in fifth-century BC Greece, set out the Four Humours. Galen developed the theory about five hundred years later.
+1. B   Hippocrates, in Ancient Greece. Hippocrates, a doctor in fifth-century BC Greece, set out the Four Humours. Galen developed the theory about five hundred years later.
 2. Theory of Opposites. The Theory of Opposites was Galen's addition to the Four Humours: balance a cold, wet illness with something hot and dry.
-3. A   Blood, phlegm, yellow bile and black bile. The humours were blood, phlegm, yellow bile and black bile, each linked to one of the four elements.
+3. C   Blood, phlegm, yellow bile and black bile. The humours were blood, phlegm, yellow bile and black bile, each linked to one of the four elements.
 Say the route each score points to: 3/3 Stretch, 2/3 Core, 0–1 Support. Pupils may choose to move up.</a:t>
             </a:r>
             <a:endParaRPr lang="en-US" dirty="0"/>
@@ -7501,7 +7501,7 @@
                 <a:ea typeface="Calibri" pitchFamily="34" charset="-122"/>
                 <a:cs typeface="Calibri" pitchFamily="34" charset="-120"/>
               </a:rPr>
-              <a:t>Something cold and wet, such as cucumber</a:t>
+              <a:t>Clearing the rubbish from the street outside</a:t>
             </a:r>
             <a:endParaRPr lang="en-US" sz="2600" dirty="0"/>
           </a:p>
@@ -7538,7 +7538,7 @@
                 <a:ea typeface="Calibri" pitchFamily="34" charset="-122"/>
                 <a:cs typeface="Calibri" pitchFamily="34" charset="-120"/>
               </a:rPr>
-              <a:t>Something hot and dry, such as peppers</a:t>
+              <a:t>A pilgrimage to a holy shrine</a:t>
             </a:r>
             <a:endParaRPr lang="en-US" sz="2600" dirty="0"/>
           </a:p>
@@ -7575,7 +7575,7 @@
                 <a:ea typeface="Calibri" pitchFamily="34" charset="-122"/>
                 <a:cs typeface="Calibri" pitchFamily="34" charset="-120"/>
               </a:rPr>
-              <a:t>A pilgrimage to a holy shrine</a:t>
+              <a:t>Something cold and wet, such as cucumber</a:t>
             </a:r>
             <a:endParaRPr lang="en-US" sz="2600" dirty="0"/>
           </a:p>
@@ -7612,7 +7612,7 @@
                 <a:ea typeface="Calibri" pitchFamily="34" charset="-122"/>
                 <a:cs typeface="Calibri" pitchFamily="34" charset="-120"/>
               </a:rPr>
-              <a:t>Clearing the rubbish from the street outside</a:t>
+              <a:t>Something hot and dry, such as peppers</a:t>
             </a:r>
             <a:endParaRPr lang="en-US" sz="2600" dirty="0"/>
           </a:p>
@@ -9013,7 +9013,7 @@
                 <a:ea typeface="Calibri" pitchFamily="34" charset="-122"/>
                 <a:cs typeface="Calibri" pitchFamily="34" charset="-120"/>
               </a:rPr>
-              <a:t>Galen, in Ancient Rome</a:t>
+              <a:t>Hippocrates, in Ancient Greece</a:t>
             </a:r>
             <a:endParaRPr lang="en-US" sz="2400" dirty="0"/>
           </a:p>
@@ -9050,7 +9050,7 @@
                 <a:ea typeface="Calibri" pitchFamily="34" charset="-122"/>
                 <a:cs typeface="Calibri" pitchFamily="34" charset="-120"/>
               </a:rPr>
-              <a:t>John of Gaddesden, in England</a:t>
+              <a:t>William the Conqueror, in Normandy</a:t>
             </a:r>
             <a:endParaRPr lang="en-US" sz="2400" dirty="0"/>
           </a:p>
@@ -9087,7 +9087,7 @@
                 <a:ea typeface="Calibri" pitchFamily="34" charset="-122"/>
                 <a:cs typeface="Calibri" pitchFamily="34" charset="-120"/>
               </a:rPr>
-              <a:t>William the Conqueror, in Normandy</a:t>
+              <a:t>John of Gaddesden, in England</a:t>
             </a:r>
             <a:endParaRPr lang="en-US" sz="2400" dirty="0"/>
           </a:p>
@@ -9124,7 +9124,7 @@
                 <a:ea typeface="Calibri" pitchFamily="34" charset="-122"/>
                 <a:cs typeface="Calibri" pitchFamily="34" charset="-120"/>
               </a:rPr>
-              <a:t>Hippocrates, in Ancient Greece</a:t>
+              <a:t>Galen, in Ancient Rome</a:t>
             </a:r>
             <a:endParaRPr lang="en-US" sz="2400" dirty="0"/>
           </a:p>
@@ -10136,7 +10136,7 @@
                 <a:ea typeface="Cambria" pitchFamily="34" charset="-122"/>
                 <a:cs typeface="Cambria" pitchFamily="34" charset="-120"/>
               </a:rPr>
-              <a:t>A   Something cold and wet, such as cucumber</a:t>
+              <a:t>C   Something cold and wet, such as cucumber</a:t>
             </a:r>
             <a:endParaRPr lang="en-US" sz="1800" dirty="0"/>
           </a:p>
@@ -10670,7 +10670,7 @@
                 <a:ea typeface="Calibri" pitchFamily="34" charset="-122"/>
                 <a:cs typeface="Calibri" pitchFamily="34" charset="-120"/>
               </a:rPr>
-              <a:t>Hippocrates, in Ancient Greece</a:t>
+              <a:t>Galen, in Ancient Rome</a:t>
             </a:r>
             <a:endParaRPr lang="en-US" sz="1800" dirty="0"/>
           </a:p>
@@ -10707,7 +10707,7 @@
                 <a:ea typeface="Calibri" pitchFamily="34" charset="-122"/>
                 <a:cs typeface="Calibri" pitchFamily="34" charset="-120"/>
               </a:rPr>
-              <a:t>Galen, in Ancient Rome</a:t>
+              <a:t>Hippocrates, in Ancient Greece</a:t>
             </a:r>
             <a:endParaRPr lang="en-US" sz="1800" dirty="0"/>
           </a:p>
@@ -10744,7 +10744,7 @@
                 <a:ea typeface="Calibri" pitchFamily="34" charset="-122"/>
                 <a:cs typeface="Calibri" pitchFamily="34" charset="-120"/>
               </a:rPr>
-              <a:t>John of Gaddesden, in England</a:t>
+              <a:t>William the Conqueror, in Normandy</a:t>
             </a:r>
             <a:endParaRPr lang="en-US" sz="1800" dirty="0"/>
           </a:p>
@@ -10781,7 +10781,7 @@
                 <a:ea typeface="Calibri" pitchFamily="34" charset="-122"/>
                 <a:cs typeface="Calibri" pitchFamily="34" charset="-120"/>
               </a:rPr>
-              <a:t>William the Conqueror, in Normandy</a:t>
+              <a:t>John of Gaddesden, in England</a:t>
             </a:r>
             <a:endParaRPr lang="en-US" sz="1800" dirty="0"/>
           </a:p>
@@ -11183,7 +11183,7 @@
                 <a:ea typeface="Calibri" pitchFamily="34" charset="-122"/>
                 <a:cs typeface="Calibri" pitchFamily="34" charset="-120"/>
               </a:rPr>
-              <a:t>Blood, phlegm, yellow bile and black bile</a:t>
+              <a:t>Blood, phlegm, urine and bile</a:t>
             </a:r>
             <a:endParaRPr lang="en-US" sz="1800" dirty="0"/>
           </a:p>
@@ -11257,7 +11257,7 @@
                 <a:ea typeface="Calibri" pitchFamily="34" charset="-122"/>
                 <a:cs typeface="Calibri" pitchFamily="34" charset="-120"/>
               </a:rPr>
-              <a:t>Blood, phlegm, urine and bile</a:t>
+              <a:t>Blood, phlegm, yellow bile and black bile</a:t>
             </a:r>
             <a:endParaRPr lang="en-US" sz="1800" dirty="0"/>
           </a:p>
@@ -11633,7 +11633,7 @@
                 <a:ea typeface="Cambria" pitchFamily="34" charset="-122"/>
                 <a:cs typeface="Cambria" pitchFamily="34" charset="-120"/>
               </a:rPr>
-              <a:t>D   Hippocrates, in Ancient Greece</a:t>
+              <a:t>A   Hippocrates, in Ancient Greece</a:t>
             </a:r>
             <a:endParaRPr lang="en-US" sz="1800" dirty="0"/>
           </a:p>
@@ -12154,7 +12154,7 @@
                 <a:ea typeface="Calibri" pitchFamily="34" charset="-122"/>
                 <a:cs typeface="Calibri" pitchFamily="34" charset="-120"/>
               </a:rPr>
-              <a:t>A   Hippocrates, in Ancient Greece</a:t>
+              <a:t>B   Hippocrates, in Ancient Greece</a:t>
             </a:r>
             <a:endParaRPr lang="en-US" sz="2200" dirty="0"/>
           </a:p>
@@ -12654,7 +12654,7 @@
                 <a:ea typeface="Calibri" pitchFamily="34" charset="-122"/>
                 <a:cs typeface="Calibri" pitchFamily="34" charset="-120"/>
               </a:rPr>
-              <a:t>A   Blood, phlegm, yellow bile and black bile</a:t>
+              <a:t>C   Blood, phlegm, yellow bile and black bile</a:t>
             </a:r>
             <a:endParaRPr lang="en-US" sz="2200" dirty="0"/>
           </a:p>

--- a/decks/hist-medicine/hist-medicine_ch3_four-humours.pptx
+++ b/decks/hist-medicine/hist-medicine_ch3_four-humours.pptx
@@ -126,30 +126,30 @@
   <p:extLst>
     <p:ext uri="{521415D9-36F7-43E2-AB2F-B90AF26B5E84}">
       <p14:sectionLst xmlns:p14="http://schemas.microsoft.com/office/powerpoint/2010/main">
-        <p14:section name="Opening" id="{2c6cbfbd-585a-4696-7095-72585edaa220}">
+        <p14:section name="Opening" id="{4db004ac-7864-1258-cba8-b3f1f680b585}">
           <p14:sldIdLst>
             <p14:sldId id="256"/>
           </p14:sldIdLst>
         </p14:section>
-        <p14:section name="Gate" id="{8e0791f2-00cd-ae97-0b40-9020f5baa479}">
+        <p14:section name="Gate" id="{651703aa-e7b7-a300-4c84-c1e3a4269dbc}">
           <p14:sldIdLst>
             <p14:sldId id="257"/>
             <p14:sldId id="258"/>
           </p14:sldIdLst>
         </p14:section>
-        <p14:section name="Pre-teach" id="{24f4aeab-d64e-0038-8c09-bc999034f09d}">
+        <p14:section name="Pre-teach" id="{f158d9db-e252-9aef-290e-a80f76cb4009}">
           <p14:sldIdLst>
             <p14:sldId id="259"/>
             <p14:sldId id="260"/>
           </p14:sldIdLst>
         </p14:section>
-        <p14:section name="Read-along" id="{7fd1ee26-8ad7-c471-24d9-e1b68a315d16}">
+        <p14:section name="Read-along" id="{bb00db9e-0edb-9d17-159b-d350a7e6c5ee}">
           <p14:sldIdLst>
             <p14:sldId id="261"/>
             <p14:sldId id="262"/>
           </p14:sldIdLst>
         </p14:section>
-        <p14:section name="Teach" id="{bda96cb1-f0a2-aa5e-e808-7c5f051d44d3}">
+        <p14:section name="Teach" id="{0dd2bd82-ec63-64e4-5020-03410f961dcb}">
           <p14:sldIdLst>
             <p14:sldId id="263"/>
             <p14:sldId id="264"/>
@@ -158,7 +158,7 @@
             <p14:sldId id="267"/>
           </p14:sldIdLst>
         </p14:section>
-        <p14:section name="Routes" id="{af83ac7f-2bbf-f718-3705-981bfd17d23e}">
+        <p14:section name="Routes" id="{4c7a625a-65f9-fd5d-dbf4-913682b29383}">
           <p14:sldIdLst>
             <p14:sldId id="268"/>
             <p14:sldId id="269"/>
@@ -166,12 +166,12 @@
             <p14:sldId id="271"/>
           </p14:sldIdLst>
         </p14:section>
-        <p14:section name="Close" id="{d2b4ae93-3db4-7330-ab02-277cff0480cd}">
+        <p14:section name="Close" id="{14c22485-e527-baba-27fa-c01428a5e69b}">
           <p14:sldIdLst>
             <p14:sldId id="272"/>
           </p14:sldIdLst>
         </p14:section>
-        <p14:section name="Answers" id="{4b8aed24-0aa9-7b2a-3841-cdc5f43be519}">
+        <p14:section name="Answers" id="{0c76381c-ed16-7db4-1f8a-961f545e4896}">
           <p14:sldIdLst>
             <p14:sldId id="273"/>
             <p14:sldId id="274"/>
